--- a/课程/课件/C2/C2-B-pro/C2-B-07/C2-B-07.pptx
+++ b/课程/课件/C2/C2-B-pro/C2-B-07/C2-B-07.pptx
@@ -11079,7 +11079,7 @@
                   <a:srgbClr val="000000"/>
                 </a:solidFill>
               </a:rPr>
-              <a:t>跟练：默写 Prim 主循环和多源 BFS 初始化；4 顶点图手算 Prim、Kruskal 并比较总权值。</a:t>
+              <a:t>跟练：默写多源 BFS 初始化；4 顶点图手算 Prim、Kruskal 并比较总权值。</a:t>
             </a:r>
             <a:endParaRPr lang="en-US" sz="1800" dirty="0"/>
           </a:p>
@@ -11292,7 +11292,7 @@
                 <a:ea typeface="微软雅黑" panose="020B0503020204020204" pitchFamily="34" charset="-122"/>
                 <a:cs typeface="微软雅黑" panose="020B0503020204020204" pitchFamily="34" charset="-120"/>
               </a:rPr>
-              <a:t>参考答案 · 跟练题一</a:t>
+              <a:t>教学参考 · 非背诵要求</a:t>
             </a:r>
             <a:endParaRPr lang="en-US" sz="1400" dirty="0"/>
           </a:p>
@@ -11330,7 +11330,7 @@
                 <a:ea typeface="微软雅黑" panose="020B0503020204020204" pitchFamily="34" charset="-122"/>
                 <a:cs typeface="微软雅黑" panose="020B0503020204020204" pitchFamily="34" charset="-120"/>
               </a:rPr>
-              <a:t>跟练题一参考答案：Prim 默写（自行对照）</a:t>
+              <a:t>Prim 实现参考（不要求背诵）</a:t>
             </a:r>
             <a:endParaRPr lang="en-US" sz="2800" dirty="0"/>
           </a:p>
@@ -11395,7 +11395,7 @@
                 <a:ea typeface="微软雅黑" panose="020B0503020204020204" pitchFamily="34" charset="-122"/>
                 <a:cs typeface="微软雅黑" panose="020B0503020204020204" pitchFamily="34" charset="-120"/>
               </a:rPr>
-              <a:t>默写检查：初始化写循环（不能写 dist[] = {INF}）；每轮选最小、并入、刷新三拍。完整代码同步见讲稿附录二，可复制。</a:t>
+              <a:t>实现参考：Prim代码不考、不要求背诵；手算按轮次选边并更新连接代价，记录生成树和总权值。</a:t>
             </a:r>
             <a:endParaRPr lang="en-US" sz="1300" dirty="0"/>
           </a:p>
@@ -12282,7 +12282,7 @@
                           <a:ea typeface="微软雅黑" panose="020B0503020204020204" pitchFamily="34" charset="-122"/>
                           <a:cs typeface="微软雅黑" panose="020B0503020204020204" pitchFamily="34" charset="-120"/>
                         </a:rPr>
-                        <a:t>逐行走主循环，骨架背默</a:t>
+                        <a:t>手算选边；Prim 不背代码</a:t>
                       </a:r>
                       <a:endParaRPr lang="en-US" sz="1500" dirty="0">
                         <a:latin typeface="微软雅黑" panose="020B0503020204020204" pitchFamily="34" charset="-122"/>
@@ -12488,7 +12488,7 @@
                           <a:ea typeface="微软雅黑" panose="020B0503020204020204" pitchFamily="34" charset="-122"/>
                           <a:cs typeface="微软雅黑" panose="020B0503020204020204" pitchFamily="34" charset="-120"/>
                         </a:rPr>
-                        <a:t>只给骨架，讲清三重循环的含义</a:t>
+                        <a:t>逐轮手算，不背代码</a:t>
                       </a:r>
                       <a:endParaRPr lang="en-US" sz="1500" dirty="0">
                         <a:latin typeface="微软雅黑" panose="020B0503020204020204" pitchFamily="34" charset="-122"/>
